--- a/courses/俄语课件/俄语_Day1_L1.pptx
+++ b/courses/俄语课件/俄语_Day1_L1.pptx
@@ -15,8 +15,6 @@
     <p:sldId id="263" r:id="rId14"/>
     <p:sldId id="264" r:id="rId15"/>
     <p:sldId id="265" r:id="rId16"/>
-    <p:sldId id="266" r:id="rId17"/>
-    <p:sldId id="267" r:id="rId18"/>
   </p:sldIdLst>
   <p:sldSz cx="9144000" cy="6858000" type="screen4x3"/>
   <p:notesSz cx="6858000" cy="9144000"/>
@@ -3214,59 +3212,7 @@
       </p:sp>
       <p:sp>
         <p:nvSpPr>
-          <p:cNvPr id="5" name="Rounded Rectangle 4"/>
-          <p:cNvSpPr/>
-          <p:nvPr/>
-        </p:nvSpPr>
-        <p:spPr>
-          <a:xfrm>
-            <a:off x="1828800" y="4572000"/>
-            <a:ext cx="5486400" cy="731520"/>
-          </a:xfrm>
-          <a:prstGeom prst="roundRect">
-            <a:avLst/>
-          </a:prstGeom>
-          <a:solidFill>
-            <a:srgbClr val="4682B4"/>
-          </a:solidFill>
-          <a:ln>
-            <a:noFill/>
-          </a:ln>
-        </p:spPr>
-        <p:style>
-          <a:lnRef idx="1">
-            <a:schemeClr val="accent1"/>
-          </a:lnRef>
-          <a:fillRef idx="3">
-            <a:schemeClr val="accent1"/>
-          </a:fillRef>
-          <a:effectRef idx="2">
-            <a:schemeClr val="accent1"/>
-          </a:effectRef>
-          <a:fontRef idx="minor">
-            <a:schemeClr val="lt1"/>
-          </a:fontRef>
-        </p:style>
-        <p:txBody>
-          <a:bodyPr rtlCol="0" anchor="ctr"/>
-          <a:lstStyle/>
-          <a:p>
-            <a:pPr algn="ctr">
-              <a:defRPr sz="2200">
-                <a:solidFill>
-                  <a:srgbClr val="FFFFFF"/>
-                </a:solidFill>
-              </a:defRPr>
-            </a:pPr>
-            <a:r>
-              <a:t>Imenitelnyy &amp; Roditelny padesh</a:t>
-            </a:r>
-          </a:p>
-        </p:txBody>
-      </p:sp>
-      <p:sp>
-        <p:nvSpPr>
-          <p:cNvPr id="6" name="TextBox 5"/>
+          <p:cNvPr id="5" name="TextBox 4"/>
           <p:cNvSpPr txBox="1"/>
           <p:nvPr/>
         </p:nvSpPr>
@@ -3294,7 +3240,7 @@
               </a:defRPr>
             </a:pPr>
             <a:r>
-              <a:t>Day1-L1/12</a:t>
+              <a:t>День 1/84</a:t>
             </a:r>
           </a:p>
         </p:txBody>
@@ -3390,7 +3336,7 @@
               </a:defRPr>
             </a:pPr>
             <a:r>
-              <a:t>九、翻译练习</a:t>
+              <a:t>九、本课重点总结</a:t>
             </a:r>
           </a:p>
         </p:txBody>
@@ -3425,7 +3371,7 @@
               </a:defRPr>
             </a:pPr>
             <a:r>
-              <a:t>Perevod</a:t>
+              <a:t>Итоги урока</a:t>
             </a:r>
           </a:p>
         </p:txBody>
@@ -3460,7 +3406,7 @@
               </a:defRPr>
             </a:pPr>
             <a:r>
-              <a:t>中译俄练习：</a:t>
+              <a:t>第2格核心用法：</a:t>
             </a:r>
           </a:p>
         </p:txBody>
@@ -3495,7 +3441,7 @@
               </a:defRPr>
             </a:pPr>
             <a:r>
-              <a:t>1. 这是我朋友的书。</a:t>
+              <a:t>① 表示所属：чьё? → ...的...</a:t>
             </a:r>
           </a:p>
         </p:txBody>
@@ -3508,7 +3454,7 @@
         </p:nvSpPr>
         <p:spPr>
           <a:xfrm>
-            <a:off x="457200" y="2240280"/>
+            <a:off x="457200" y="2212848"/>
             <a:ext cx="8229600" cy="365760"/>
           </a:xfrm>
           <a:prstGeom prst="rect">
@@ -3530,7 +3476,7 @@
               </a:defRPr>
             </a:pPr>
             <a:r>
-              <a:t>2. 我来自中国。</a:t>
+              <a:t>② 表示来源：из + 第2格 = 来自...</a:t>
             </a:r>
           </a:p>
         </p:txBody>
@@ -3543,7 +3489,7 @@
         </p:nvSpPr>
         <p:spPr>
           <a:xfrm>
-            <a:off x="457200" y="2651760"/>
+            <a:off x="457200" y="2596896"/>
             <a:ext cx="8229600" cy="365760"/>
           </a:xfrm>
           <a:prstGeom prst="rect">
@@ -3565,7 +3511,7 @@
               </a:defRPr>
             </a:pPr>
             <a:r>
-              <a:t>3. 她没有时间。</a:t>
+              <a:t>③ 数字搭配：2-4用单数，5+用复数</a:t>
             </a:r>
           </a:p>
         </p:txBody>
@@ -3578,7 +3524,7 @@
         </p:nvSpPr>
         <p:spPr>
           <a:xfrm>
-            <a:off x="457200" y="3063240"/>
+            <a:off x="457200" y="2980944"/>
             <a:ext cx="8229600" cy="365760"/>
           </a:xfrm>
           <a:prstGeom prst="rect">
@@ -3599,6 +3545,9 @@
                 </a:solidFill>
               </a:defRPr>
             </a:pPr>
+            <a:r>
+              <a:t>④ 否定结构：нет + 第2格</a:t>
+            </a:r>
           </a:p>
         </p:txBody>
       </p:sp>
@@ -3610,7 +3559,7 @@
         </p:nvSpPr>
         <p:spPr>
           <a:xfrm>
-            <a:off x="457200" y="3474720"/>
+            <a:off x="457200" y="3364991"/>
             <a:ext cx="8229600" cy="365760"/>
           </a:xfrm>
           <a:prstGeom prst="rect">
@@ -3632,7 +3581,7 @@
               </a:defRPr>
             </a:pPr>
             <a:r>
-              <a:t>参考答案：</a:t>
+              <a:t>今日关键词汇：</a:t>
             </a:r>
           </a:p>
         </p:txBody>
@@ -3645,7 +3594,7 @@
         </p:nvSpPr>
         <p:spPr>
           <a:xfrm>
-            <a:off x="457200" y="3840480"/>
+            <a:off x="457200" y="3730752"/>
             <a:ext cx="8229600" cy="365760"/>
           </a:xfrm>
           <a:prstGeom prst="rect">
@@ -3667,7 +3616,7 @@
               </a:defRPr>
             </a:pPr>
             <a:r>
-              <a:t>1. Eto kniga moego druga.</a:t>
+              <a:t>дом (房子) → дома</a:t>
             </a:r>
           </a:p>
         </p:txBody>
@@ -3680,7 +3629,7 @@
         </p:nvSpPr>
         <p:spPr>
           <a:xfrm>
-            <a:off x="457200" y="4251960"/>
+            <a:off x="457200" y="4114800"/>
             <a:ext cx="8229600" cy="365760"/>
           </a:xfrm>
           <a:prstGeom prst="rect">
@@ -3702,7 +3651,7 @@
               </a:defRPr>
             </a:pPr>
             <a:r>
-              <a:t>2. Ya iz Kitaya.</a:t>
+              <a:t>книга (书) → книги</a:t>
             </a:r>
           </a:p>
         </p:txBody>
@@ -3715,7 +3664,7 @@
         </p:nvSpPr>
         <p:spPr>
           <a:xfrm>
-            <a:off x="457200" y="4663440"/>
+            <a:off x="457200" y="4498848"/>
             <a:ext cx="8229600" cy="365760"/>
           </a:xfrm>
           <a:prstGeom prst="rect">
@@ -3737,80 +3686,27 @@
               </a:defRPr>
             </a:pPr>
             <a:r>
-              <a:t>3. U neyo net vremeni.</a:t>
-            </a:r>
-          </a:p>
-        </p:txBody>
-      </p:sp>
-      <p:sp>
-        <p:nvSpPr>
-          <p:cNvPr id="14" name="TextBox 13"/>
-          <p:cNvSpPr txBox="1"/>
-          <p:nvPr/>
-        </p:nvSpPr>
-        <p:spPr>
-          <a:xfrm>
-            <a:off x="7772400" y="6583680"/>
-            <a:ext cx="1188720" cy="274320"/>
-          </a:xfrm>
-          <a:prstGeom prst="rect">
-            <a:avLst/>
-          </a:prstGeom>
-          <a:noFill/>
-        </p:spPr>
-        <p:txBody>
-          <a:bodyPr wrap="none">
-            <a:spAutoFit/>
-          </a:bodyPr>
-          <a:lstStyle/>
-          <a:p>
-            <a:pPr algn="r">
-              <a:defRPr sz="1100">
-                <a:solidFill>
-                  <a:srgbClr val="A0A0A0"/>
-                </a:solidFill>
-              </a:defRPr>
-            </a:pPr>
-            <a:r>
-              <a:t>Day1-L1/12</a:t>
-            </a:r>
-          </a:p>
-        </p:txBody>
-      </p:sp>
-    </p:spTree>
-  </p:cSld>
-  <p:clrMapOvr>
-    <a:masterClrMapping/>
-  </p:clrMapOvr>
-</p:sld>
-</file>
-
-<file path=ppt/slides/slide11.xml><?xml version="1.0" encoding="utf-8"?>
-<p:sld xmlns:a="http://schemas.openxmlformats.org/drawingml/2006/main" xmlns:p="http://schemas.openxmlformats.org/presentationml/2006/main" xmlns:r="http://schemas.openxmlformats.org/officeDocument/2006/relationships">
-  <p:cSld>
-    <p:spTree>
-      <p:nvGrpSpPr>
-        <p:cNvPr id="1" name=""/>
-        <p:cNvGrpSpPr/>
-        <p:nvPr/>
-      </p:nvGrpSpPr>
-      <p:grpSpPr/>
-      <p:sp>
-        <p:nvSpPr>
-          <p:cNvPr id="2" name="Rectangle 1"/>
+              <a:t>студент (学生) → студента</a:t>
+            </a:r>
+          </a:p>
+        </p:txBody>
+      </p:sp>
+      <p:sp>
+        <p:nvSpPr>
+          <p:cNvPr id="14" name="Rounded Rectangle 13"/>
           <p:cNvSpPr/>
           <p:nvPr/>
         </p:nvSpPr>
         <p:spPr>
           <a:xfrm>
-            <a:off x="0" y="0"/>
-            <a:ext cx="9144000" cy="1280160"/>
-          </a:xfrm>
-          <a:prstGeom prst="rect">
+            <a:off x="457200" y="4882896"/>
+            <a:ext cx="8229600" cy="457200"/>
+          </a:xfrm>
+          <a:prstGeom prst="roundRect">
             <a:avLst/>
           </a:prstGeom>
           <a:solidFill>
-            <a:srgbClr val="1E3C72"/>
+            <a:srgbClr val="B48C32"/>
           </a:solidFill>
           <a:ln>
             <a:noFill/>
@@ -3831,446 +3727,18 @@
           </a:fontRef>
         </p:style>
         <p:txBody>
-          <a:bodyPr rtlCol="0" anchor="ctr"/>
-          <a:lstStyle/>
-          <a:p>
-            <a:pPr algn="ctr"/>
-          </a:p>
-        </p:txBody>
-      </p:sp>
-      <p:sp>
-        <p:nvSpPr>
-          <p:cNvPr id="3" name="TextBox 2"/>
-          <p:cNvSpPr txBox="1"/>
-          <p:nvPr/>
-        </p:nvSpPr>
-        <p:spPr>
-          <a:xfrm>
-            <a:off x="457200" y="228600"/>
-            <a:ext cx="8229600" cy="640080"/>
-          </a:xfrm>
-          <a:prstGeom prst="rect">
-            <a:avLst/>
-          </a:prstGeom>
-          <a:noFill/>
-        </p:spPr>
-        <p:txBody>
-          <a:bodyPr wrap="none">
-            <a:spAutoFit/>
-          </a:bodyPr>
-          <a:lstStyle/>
-          <a:p>
-            <a:pPr>
-              <a:defRPr sz="3200" b="1">
+          <a:bodyPr rtlCol="0" anchor="ctr" wrap="square"/>
+          <a:lstStyle/>
+          <a:p>
+            <a:pPr algn="ctr">
+              <a:defRPr sz="1400">
                 <a:solidFill>
                   <a:srgbClr val="FFFFFF"/>
                 </a:solidFill>
               </a:defRPr>
             </a:pPr>
             <a:r>
-              <a:t>十、本课重点总结</a:t>
-            </a:r>
-          </a:p>
-        </p:txBody>
-      </p:sp>
-      <p:sp>
-        <p:nvSpPr>
-          <p:cNvPr id="4" name="TextBox 3"/>
-          <p:cNvSpPr txBox="1"/>
-          <p:nvPr/>
-        </p:nvSpPr>
-        <p:spPr>
-          <a:xfrm>
-            <a:off x="457200" y="777240"/>
-            <a:ext cx="8229600" cy="365760"/>
-          </a:xfrm>
-          <a:prstGeom prst="rect">
-            <a:avLst/>
-          </a:prstGeom>
-          <a:noFill/>
-        </p:spPr>
-        <p:txBody>
-          <a:bodyPr wrap="none">
-            <a:spAutoFit/>
-          </a:bodyPr>
-          <a:lstStyle/>
-          <a:p>
-            <a:pPr>
-              <a:defRPr sz="1800">
-                <a:solidFill>
-                  <a:srgbClr val="C8DCFF"/>
-                </a:solidFill>
-              </a:defRPr>
-            </a:pPr>
-            <a:r>
-              <a:t>Itogi uroka</a:t>
-            </a:r>
-          </a:p>
-        </p:txBody>
-      </p:sp>
-      <p:sp>
-        <p:nvSpPr>
-          <p:cNvPr id="5" name="TextBox 4"/>
-          <p:cNvSpPr txBox="1"/>
-          <p:nvPr/>
-        </p:nvSpPr>
-        <p:spPr>
-          <a:xfrm>
-            <a:off x="457200" y="1463040"/>
-            <a:ext cx="8229600" cy="365760"/>
-          </a:xfrm>
-          <a:prstGeom prst="rect">
-            <a:avLst/>
-          </a:prstGeom>
-          <a:noFill/>
-        </p:spPr>
-        <p:txBody>
-          <a:bodyPr wrap="none">
-            <a:spAutoFit/>
-          </a:bodyPr>
-          <a:lstStyle/>
-          <a:p>
-            <a:pPr>
-              <a:defRPr sz="1600" b="1">
-                <a:solidFill>
-                  <a:srgbClr val="1E3C72"/>
-                </a:solidFill>
-              </a:defRPr>
-            </a:pPr>
-            <a:r>
-              <a:t>第2格核心用法：</a:t>
-            </a:r>
-          </a:p>
-        </p:txBody>
-      </p:sp>
-      <p:sp>
-        <p:nvSpPr>
-          <p:cNvPr id="6" name="TextBox 5"/>
-          <p:cNvSpPr txBox="1"/>
-          <p:nvPr/>
-        </p:nvSpPr>
-        <p:spPr>
-          <a:xfrm>
-            <a:off x="457200" y="1828800"/>
-            <a:ext cx="8229600" cy="365760"/>
-          </a:xfrm>
-          <a:prstGeom prst="rect">
-            <a:avLst/>
-          </a:prstGeom>
-          <a:noFill/>
-        </p:spPr>
-        <p:txBody>
-          <a:bodyPr wrap="none">
-            <a:spAutoFit/>
-          </a:bodyPr>
-          <a:lstStyle/>
-          <a:p>
-            <a:pPr>
-              <a:defRPr sz="1500">
-                <a:solidFill>
-                  <a:srgbClr val="333333"/>
-                </a:solidFill>
-              </a:defRPr>
-            </a:pPr>
-            <a:r>
-              <a:t>① 表示所属：chyo? &gt; ...的...</a:t>
-            </a:r>
-          </a:p>
-        </p:txBody>
-      </p:sp>
-      <p:sp>
-        <p:nvSpPr>
-          <p:cNvPr id="7" name="TextBox 6"/>
-          <p:cNvSpPr txBox="1"/>
-          <p:nvPr/>
-        </p:nvSpPr>
-        <p:spPr>
-          <a:xfrm>
-            <a:off x="457200" y="2240280"/>
-            <a:ext cx="8229600" cy="365760"/>
-          </a:xfrm>
-          <a:prstGeom prst="rect">
-            <a:avLst/>
-          </a:prstGeom>
-          <a:noFill/>
-        </p:spPr>
-        <p:txBody>
-          <a:bodyPr wrap="none">
-            <a:spAutoFit/>
-          </a:bodyPr>
-          <a:lstStyle/>
-          <a:p>
-            <a:pPr>
-              <a:defRPr sz="1500">
-                <a:solidFill>
-                  <a:srgbClr val="333333"/>
-                </a:solidFill>
-              </a:defRPr>
-            </a:pPr>
-            <a:r>
-              <a:t>② 表示来源：iz + 第2格 = 来自...</a:t>
-            </a:r>
-          </a:p>
-        </p:txBody>
-      </p:sp>
-      <p:sp>
-        <p:nvSpPr>
-          <p:cNvPr id="8" name="TextBox 7"/>
-          <p:cNvSpPr txBox="1"/>
-          <p:nvPr/>
-        </p:nvSpPr>
-        <p:spPr>
-          <a:xfrm>
-            <a:off x="457200" y="2651760"/>
-            <a:ext cx="8229600" cy="365760"/>
-          </a:xfrm>
-          <a:prstGeom prst="rect">
-            <a:avLst/>
-          </a:prstGeom>
-          <a:noFill/>
-        </p:spPr>
-        <p:txBody>
-          <a:bodyPr wrap="none">
-            <a:spAutoFit/>
-          </a:bodyPr>
-          <a:lstStyle/>
-          <a:p>
-            <a:pPr>
-              <a:defRPr sz="1500">
-                <a:solidFill>
-                  <a:srgbClr val="333333"/>
-                </a:solidFill>
-              </a:defRPr>
-            </a:pPr>
-            <a:r>
-              <a:t>③ 数字搭配：2-4用单数，5+用复数</a:t>
-            </a:r>
-          </a:p>
-        </p:txBody>
-      </p:sp>
-      <p:sp>
-        <p:nvSpPr>
-          <p:cNvPr id="9" name="TextBox 8"/>
-          <p:cNvSpPr txBox="1"/>
-          <p:nvPr/>
-        </p:nvSpPr>
-        <p:spPr>
-          <a:xfrm>
-            <a:off x="457200" y="3063240"/>
-            <a:ext cx="8229600" cy="365760"/>
-          </a:xfrm>
-          <a:prstGeom prst="rect">
-            <a:avLst/>
-          </a:prstGeom>
-          <a:noFill/>
-        </p:spPr>
-        <p:txBody>
-          <a:bodyPr wrap="none">
-            <a:spAutoFit/>
-          </a:bodyPr>
-          <a:lstStyle/>
-          <a:p>
-            <a:pPr>
-              <a:defRPr sz="1500">
-                <a:solidFill>
-                  <a:srgbClr val="333333"/>
-                </a:solidFill>
-              </a:defRPr>
-            </a:pPr>
-            <a:r>
-              <a:t>④ 否定结构：net + 第2格</a:t>
-            </a:r>
-          </a:p>
-        </p:txBody>
-      </p:sp>
-      <p:sp>
-        <p:nvSpPr>
-          <p:cNvPr id="10" name="TextBox 9"/>
-          <p:cNvSpPr txBox="1"/>
-          <p:nvPr/>
-        </p:nvSpPr>
-        <p:spPr>
-          <a:xfrm>
-            <a:off x="457200" y="3474720"/>
-            <a:ext cx="8229600" cy="365760"/>
-          </a:xfrm>
-          <a:prstGeom prst="rect">
-            <a:avLst/>
-          </a:prstGeom>
-          <a:noFill/>
-        </p:spPr>
-        <p:txBody>
-          <a:bodyPr wrap="none">
-            <a:spAutoFit/>
-          </a:bodyPr>
-          <a:lstStyle/>
-          <a:p>
-            <a:pPr>
-              <a:defRPr sz="1600" b="1">
-                <a:solidFill>
-                  <a:srgbClr val="1E3C72"/>
-                </a:solidFill>
-              </a:defRPr>
-            </a:pPr>
-            <a:r>
-              <a:t>今日关键词汇：</a:t>
-            </a:r>
-          </a:p>
-        </p:txBody>
-      </p:sp>
-      <p:sp>
-        <p:nvSpPr>
-          <p:cNvPr id="11" name="TextBox 10"/>
-          <p:cNvSpPr txBox="1"/>
-          <p:nvPr/>
-        </p:nvSpPr>
-        <p:spPr>
-          <a:xfrm>
-            <a:off x="457200" y="3840480"/>
-            <a:ext cx="8229600" cy="365760"/>
-          </a:xfrm>
-          <a:prstGeom prst="rect">
-            <a:avLst/>
-          </a:prstGeom>
-          <a:noFill/>
-        </p:spPr>
-        <p:txBody>
-          <a:bodyPr wrap="none">
-            <a:spAutoFit/>
-          </a:bodyPr>
-          <a:lstStyle/>
-          <a:p>
-            <a:pPr>
-              <a:defRPr sz="1500">
-                <a:solidFill>
-                  <a:srgbClr val="333333"/>
-                </a:solidFill>
-              </a:defRPr>
-            </a:pPr>
-            <a:r>
-              <a:t>dom (房子) &gt; doma</a:t>
-            </a:r>
-          </a:p>
-        </p:txBody>
-      </p:sp>
-      <p:sp>
-        <p:nvSpPr>
-          <p:cNvPr id="12" name="TextBox 11"/>
-          <p:cNvSpPr txBox="1"/>
-          <p:nvPr/>
-        </p:nvSpPr>
-        <p:spPr>
-          <a:xfrm>
-            <a:off x="457200" y="4251960"/>
-            <a:ext cx="8229600" cy="365760"/>
-          </a:xfrm>
-          <a:prstGeom prst="rect">
-            <a:avLst/>
-          </a:prstGeom>
-          <a:noFill/>
-        </p:spPr>
-        <p:txBody>
-          <a:bodyPr wrap="none">
-            <a:spAutoFit/>
-          </a:bodyPr>
-          <a:lstStyle/>
-          <a:p>
-            <a:pPr>
-              <a:defRPr sz="1500">
-                <a:solidFill>
-                  <a:srgbClr val="333333"/>
-                </a:solidFill>
-              </a:defRPr>
-            </a:pPr>
-            <a:r>
-              <a:t>kniga (书) &gt; knigi</a:t>
-            </a:r>
-          </a:p>
-        </p:txBody>
-      </p:sp>
-      <p:sp>
-        <p:nvSpPr>
-          <p:cNvPr id="13" name="TextBox 12"/>
-          <p:cNvSpPr txBox="1"/>
-          <p:nvPr/>
-        </p:nvSpPr>
-        <p:spPr>
-          <a:xfrm>
-            <a:off x="457200" y="4663440"/>
-            <a:ext cx="8229600" cy="365760"/>
-          </a:xfrm>
-          <a:prstGeom prst="rect">
-            <a:avLst/>
-          </a:prstGeom>
-          <a:noFill/>
-        </p:spPr>
-        <p:txBody>
-          <a:bodyPr wrap="none">
-            <a:spAutoFit/>
-          </a:bodyPr>
-          <a:lstStyle/>
-          <a:p>
-            <a:pPr>
-              <a:defRPr sz="1500">
-                <a:solidFill>
-                  <a:srgbClr val="333333"/>
-                </a:solidFill>
-              </a:defRPr>
-            </a:pPr>
-            <a:r>
-              <a:t>student (学生) &gt; studenta</a:t>
-            </a:r>
-          </a:p>
-        </p:txBody>
-      </p:sp>
-      <p:sp>
-        <p:nvSpPr>
-          <p:cNvPr id="14" name="Rounded Rectangle 13"/>
-          <p:cNvSpPr/>
-          <p:nvPr/>
-        </p:nvSpPr>
-        <p:spPr>
-          <a:xfrm>
-            <a:off x="457200" y="5074920"/>
-            <a:ext cx="8229600" cy="457200"/>
-          </a:xfrm>
-          <a:prstGeom prst="roundRect">
-            <a:avLst/>
-          </a:prstGeom>
-          <a:solidFill>
-            <a:srgbClr val="B48C32"/>
-          </a:solidFill>
-          <a:ln>
-            <a:noFill/>
-          </a:ln>
-        </p:spPr>
-        <p:style>
-          <a:lnRef idx="1">
-            <a:schemeClr val="accent1"/>
-          </a:lnRef>
-          <a:fillRef idx="3">
-            <a:schemeClr val="accent1"/>
-          </a:fillRef>
-          <a:effectRef idx="2">
-            <a:schemeClr val="accent1"/>
-          </a:effectRef>
-          <a:fontRef idx="minor">
-            <a:schemeClr val="lt1"/>
-          </a:fontRef>
-        </p:style>
-        <p:txBody>
-          <a:bodyPr rtlCol="0" anchor="ctr" wrap="square"/>
-          <a:lstStyle/>
-          <a:p>
-            <a:pPr algn="ctr">
-              <a:defRPr sz="1400" b="0">
-                <a:solidFill>
-                  <a:srgbClr val="FFFFFF"/>
-                </a:solidFill>
-              </a:defRPr>
-            </a:pPr>
-            <a:r>
-              <a:t>记住：名词第2格回答chya?</a:t>
+              <a:t>记住：名词第2格回答чья?</a:t>
             </a:r>
           </a:p>
         </p:txBody>
@@ -4305,517 +3773,7 @@
               </a:defRPr>
             </a:pPr>
             <a:r>
-              <a:t>Day1-L1/12</a:t>
-            </a:r>
-          </a:p>
-        </p:txBody>
-      </p:sp>
-    </p:spTree>
-  </p:cSld>
-  <p:clrMapOvr>
-    <a:masterClrMapping/>
-  </p:clrMapOvr>
-</p:sld>
-</file>
-
-<file path=ppt/slides/slide12.xml><?xml version="1.0" encoding="utf-8"?>
-<p:sld xmlns:a="http://schemas.openxmlformats.org/drawingml/2006/main" xmlns:p="http://schemas.openxmlformats.org/presentationml/2006/main" xmlns:r="http://schemas.openxmlformats.org/officeDocument/2006/relationships">
-  <p:cSld>
-    <p:spTree>
-      <p:nvGrpSpPr>
-        <p:cNvPr id="1" name=""/>
-        <p:cNvGrpSpPr/>
-        <p:nvPr/>
-      </p:nvGrpSpPr>
-      <p:grpSpPr/>
-      <p:sp>
-        <p:nvSpPr>
-          <p:cNvPr id="2" name="Rectangle 1"/>
-          <p:cNvSpPr/>
-          <p:nvPr/>
-        </p:nvSpPr>
-        <p:spPr>
-          <a:xfrm>
-            <a:off x="0" y="0"/>
-            <a:ext cx="9144000" cy="1280160"/>
-          </a:xfrm>
-          <a:prstGeom prst="rect">
-            <a:avLst/>
-          </a:prstGeom>
-          <a:solidFill>
-            <a:srgbClr val="1E3C72"/>
-          </a:solidFill>
-          <a:ln>
-            <a:noFill/>
-          </a:ln>
-        </p:spPr>
-        <p:style>
-          <a:lnRef idx="1">
-            <a:schemeClr val="accent1"/>
-          </a:lnRef>
-          <a:fillRef idx="3">
-            <a:schemeClr val="accent1"/>
-          </a:fillRef>
-          <a:effectRef idx="2">
-            <a:schemeClr val="accent1"/>
-          </a:effectRef>
-          <a:fontRef idx="minor">
-            <a:schemeClr val="lt1"/>
-          </a:fontRef>
-        </p:style>
-        <p:txBody>
-          <a:bodyPr rtlCol="0" anchor="ctr"/>
-          <a:lstStyle/>
-          <a:p>
-            <a:pPr algn="ctr"/>
-          </a:p>
-        </p:txBody>
-      </p:sp>
-      <p:sp>
-        <p:nvSpPr>
-          <p:cNvPr id="3" name="TextBox 2"/>
-          <p:cNvSpPr txBox="1"/>
-          <p:nvPr/>
-        </p:nvSpPr>
-        <p:spPr>
-          <a:xfrm>
-            <a:off x="457200" y="228600"/>
-            <a:ext cx="8229600" cy="640080"/>
-          </a:xfrm>
-          <a:prstGeom prst="rect">
-            <a:avLst/>
-          </a:prstGeom>
-          <a:noFill/>
-        </p:spPr>
-        <p:txBody>
-          <a:bodyPr wrap="none">
-            <a:spAutoFit/>
-          </a:bodyPr>
-          <a:lstStyle/>
-          <a:p>
-            <a:pPr>
-              <a:defRPr sz="3200" b="1">
-                <a:solidFill>
-                  <a:srgbClr val="FFFFFF"/>
-                </a:solidFill>
-              </a:defRPr>
-            </a:pPr>
-            <a:r>
-              <a:t>课后练习</a:t>
-            </a:r>
-          </a:p>
-        </p:txBody>
-      </p:sp>
-      <p:sp>
-        <p:nvSpPr>
-          <p:cNvPr id="4" name="TextBox 3"/>
-          <p:cNvSpPr txBox="1"/>
-          <p:nvPr/>
-        </p:nvSpPr>
-        <p:spPr>
-          <a:xfrm>
-            <a:off x="457200" y="777240"/>
-            <a:ext cx="8229600" cy="365760"/>
-          </a:xfrm>
-          <a:prstGeom prst="rect">
-            <a:avLst/>
-          </a:prstGeom>
-          <a:noFill/>
-        </p:spPr>
-        <p:txBody>
-          <a:bodyPr wrap="none">
-            <a:spAutoFit/>
-          </a:bodyPr>
-          <a:lstStyle/>
-          <a:p>
-            <a:pPr>
-              <a:defRPr sz="1800">
-                <a:solidFill>
-                  <a:srgbClr val="C8DCFF"/>
-                </a:solidFill>
-              </a:defRPr>
-            </a:pPr>
-            <a:r>
-              <a:t>Uprazhneniya</a:t>
-            </a:r>
-          </a:p>
-        </p:txBody>
-      </p:sp>
-      <p:sp>
-        <p:nvSpPr>
-          <p:cNvPr id="5" name="TextBox 4"/>
-          <p:cNvSpPr txBox="1"/>
-          <p:nvPr/>
-        </p:nvSpPr>
-        <p:spPr>
-          <a:xfrm>
-            <a:off x="457200" y="1554480"/>
-            <a:ext cx="8229600" cy="365760"/>
-          </a:xfrm>
-          <a:prstGeom prst="rect">
-            <a:avLst/>
-          </a:prstGeom>
-          <a:noFill/>
-        </p:spPr>
-        <p:txBody>
-          <a:bodyPr wrap="none">
-            <a:spAutoFit/>
-          </a:bodyPr>
-          <a:lstStyle/>
-          <a:p>
-            <a:pPr>
-              <a:defRPr sz="1500">
-                <a:solidFill>
-                  <a:srgbClr val="333333"/>
-                </a:solidFill>
-              </a:defRPr>
-            </a:pPr>
-            <a:r>
-              <a:t>1. 将下列名词变为第2格：</a:t>
-            </a:r>
-          </a:p>
-        </p:txBody>
-      </p:sp>
-      <p:sp>
-        <p:nvSpPr>
-          <p:cNvPr id="6" name="TextBox 5"/>
-          <p:cNvSpPr txBox="1"/>
-          <p:nvPr/>
-        </p:nvSpPr>
-        <p:spPr>
-          <a:xfrm>
-            <a:off x="457200" y="1901952"/>
-            <a:ext cx="8229600" cy="365760"/>
-          </a:xfrm>
-          <a:prstGeom prst="rect">
-            <a:avLst/>
-          </a:prstGeom>
-          <a:noFill/>
-        </p:spPr>
-        <p:txBody>
-          <a:bodyPr wrap="none">
-            <a:spAutoFit/>
-          </a:bodyPr>
-          <a:lstStyle/>
-          <a:p>
-            <a:pPr>
-              <a:defRPr sz="1500">
-                <a:solidFill>
-                  <a:srgbClr val="333333"/>
-                </a:solidFill>
-              </a:defRPr>
-            </a:pPr>
-            <a:r>
-              <a:t>   dom, kniga, okno, drug, student</a:t>
-            </a:r>
-          </a:p>
-        </p:txBody>
-      </p:sp>
-      <p:sp>
-        <p:nvSpPr>
-          <p:cNvPr id="7" name="TextBox 6"/>
-          <p:cNvSpPr txBox="1"/>
-          <p:nvPr/>
-        </p:nvSpPr>
-        <p:spPr>
-          <a:xfrm>
-            <a:off x="457200" y="2249424"/>
-            <a:ext cx="8229600" cy="365760"/>
-          </a:xfrm>
-          <a:prstGeom prst="rect">
-            <a:avLst/>
-          </a:prstGeom>
-          <a:noFill/>
-        </p:spPr>
-        <p:txBody>
-          <a:bodyPr wrap="none">
-            <a:spAutoFit/>
-          </a:bodyPr>
-          <a:lstStyle/>
-          <a:p>
-            <a:pPr>
-              <a:defRPr sz="1500">
-                <a:solidFill>
-                  <a:srgbClr val="333333"/>
-                </a:solidFill>
-              </a:defRPr>
-            </a:pPr>
-          </a:p>
-        </p:txBody>
-      </p:sp>
-      <p:sp>
-        <p:nvSpPr>
-          <p:cNvPr id="8" name="TextBox 7"/>
-          <p:cNvSpPr txBox="1"/>
-          <p:nvPr/>
-        </p:nvSpPr>
-        <p:spPr>
-          <a:xfrm>
-            <a:off x="457200" y="2596896"/>
-            <a:ext cx="8229600" cy="365760"/>
-          </a:xfrm>
-          <a:prstGeom prst="rect">
-            <a:avLst/>
-          </a:prstGeom>
-          <a:noFill/>
-        </p:spPr>
-        <p:txBody>
-          <a:bodyPr wrap="none">
-            <a:spAutoFit/>
-          </a:bodyPr>
-          <a:lstStyle/>
-          <a:p>
-            <a:pPr>
-              <a:defRPr sz="1500">
-                <a:solidFill>
-                  <a:srgbClr val="333333"/>
-                </a:solidFill>
-              </a:defRPr>
-            </a:pPr>
-            <a:r>
-              <a:t>2. 用所给名词的适当形式填空：</a:t>
-            </a:r>
-          </a:p>
-        </p:txBody>
-      </p:sp>
-      <p:sp>
-        <p:nvSpPr>
-          <p:cNvPr id="9" name="TextBox 8"/>
-          <p:cNvSpPr txBox="1"/>
-          <p:nvPr/>
-        </p:nvSpPr>
-        <p:spPr>
-          <a:xfrm>
-            <a:off x="457200" y="2944368"/>
-            <a:ext cx="8229600" cy="365760"/>
-          </a:xfrm>
-          <a:prstGeom prst="rect">
-            <a:avLst/>
-          </a:prstGeom>
-          <a:noFill/>
-        </p:spPr>
-        <p:txBody>
-          <a:bodyPr wrap="none">
-            <a:spAutoFit/>
-          </a:bodyPr>
-          <a:lstStyle/>
-          <a:p>
-            <a:pPr>
-              <a:defRPr sz="1500">
-                <a:solidFill>
-                  <a:srgbClr val="333333"/>
-                </a:solidFill>
-              </a:defRPr>
-            </a:pPr>
-            <a:r>
-              <a:t>   Ya student &gt; Ya iz ___ (Moskva)</a:t>
-            </a:r>
-          </a:p>
-        </p:txBody>
-      </p:sp>
-      <p:sp>
-        <p:nvSpPr>
-          <p:cNvPr id="10" name="TextBox 9"/>
-          <p:cNvSpPr txBox="1"/>
-          <p:nvPr/>
-        </p:nvSpPr>
-        <p:spPr>
-          <a:xfrm>
-            <a:off x="457200" y="3291839"/>
-            <a:ext cx="8229600" cy="365760"/>
-          </a:xfrm>
-          <a:prstGeom prst="rect">
-            <a:avLst/>
-          </a:prstGeom>
-          <a:noFill/>
-        </p:spPr>
-        <p:txBody>
-          <a:bodyPr wrap="none">
-            <a:spAutoFit/>
-          </a:bodyPr>
-          <a:lstStyle/>
-          <a:p>
-            <a:pPr>
-              <a:defRPr sz="1500">
-                <a:solidFill>
-                  <a:srgbClr val="333333"/>
-                </a:solidFill>
-              </a:defRPr>
-            </a:pPr>
-            <a:r>
-              <a:t>   Eto kniga &gt; Eto kniga ___ (moy drug)</a:t>
-            </a:r>
-          </a:p>
-        </p:txBody>
-      </p:sp>
-      <p:sp>
-        <p:nvSpPr>
-          <p:cNvPr id="11" name="TextBox 10"/>
-          <p:cNvSpPr txBox="1"/>
-          <p:nvPr/>
-        </p:nvSpPr>
-        <p:spPr>
-          <a:xfrm>
-            <a:off x="457200" y="3639311"/>
-            <a:ext cx="8229600" cy="365760"/>
-          </a:xfrm>
-          <a:prstGeom prst="rect">
-            <a:avLst/>
-          </a:prstGeom>
-          <a:noFill/>
-        </p:spPr>
-        <p:txBody>
-          <a:bodyPr wrap="none">
-            <a:spAutoFit/>
-          </a:bodyPr>
-          <a:lstStyle/>
-          <a:p>
-            <a:pPr>
-              <a:defRPr sz="1500">
-                <a:solidFill>
-                  <a:srgbClr val="333333"/>
-                </a:solidFill>
-              </a:defRPr>
-            </a:pPr>
-          </a:p>
-        </p:txBody>
-      </p:sp>
-      <p:sp>
-        <p:nvSpPr>
-          <p:cNvPr id="12" name="TextBox 11"/>
-          <p:cNvSpPr txBox="1"/>
-          <p:nvPr/>
-        </p:nvSpPr>
-        <p:spPr>
-          <a:xfrm>
-            <a:off x="457200" y="3986783"/>
-            <a:ext cx="8229600" cy="365760"/>
-          </a:xfrm>
-          <a:prstGeom prst="rect">
-            <a:avLst/>
-          </a:prstGeom>
-          <a:noFill/>
-        </p:spPr>
-        <p:txBody>
-          <a:bodyPr wrap="none">
-            <a:spAutoFit/>
-          </a:bodyPr>
-          <a:lstStyle/>
-          <a:p>
-            <a:pPr>
-              <a:defRPr sz="1500">
-                <a:solidFill>
-                  <a:srgbClr val="333333"/>
-                </a:solidFill>
-              </a:defRPr>
-            </a:pPr>
-            <a:r>
-              <a:t>3. 中译俄：</a:t>
-            </a:r>
-          </a:p>
-        </p:txBody>
-      </p:sp>
-      <p:sp>
-        <p:nvSpPr>
-          <p:cNvPr id="13" name="TextBox 12"/>
-          <p:cNvSpPr txBox="1"/>
-          <p:nvPr/>
-        </p:nvSpPr>
-        <p:spPr>
-          <a:xfrm>
-            <a:off x="457200" y="4334255"/>
-            <a:ext cx="8229600" cy="365760"/>
-          </a:xfrm>
-          <a:prstGeom prst="rect">
-            <a:avLst/>
-          </a:prstGeom>
-          <a:noFill/>
-        </p:spPr>
-        <p:txBody>
-          <a:bodyPr wrap="none">
-            <a:spAutoFit/>
-          </a:bodyPr>
-          <a:lstStyle/>
-          <a:p>
-            <a:pPr>
-              <a:defRPr sz="1500">
-                <a:solidFill>
-                  <a:srgbClr val="333333"/>
-                </a:solidFill>
-              </a:defRPr>
-            </a:pPr>
-            <a:r>
-              <a:t>   这是我朋友的书。</a:t>
-            </a:r>
-          </a:p>
-        </p:txBody>
-      </p:sp>
-      <p:sp>
-        <p:nvSpPr>
-          <p:cNvPr id="14" name="TextBox 13"/>
-          <p:cNvSpPr txBox="1"/>
-          <p:nvPr/>
-        </p:nvSpPr>
-        <p:spPr>
-          <a:xfrm>
-            <a:off x="457200" y="4681727"/>
-            <a:ext cx="8229600" cy="365760"/>
-          </a:xfrm>
-          <a:prstGeom prst="rect">
-            <a:avLst/>
-          </a:prstGeom>
-          <a:noFill/>
-        </p:spPr>
-        <p:txBody>
-          <a:bodyPr wrap="none">
-            <a:spAutoFit/>
-          </a:bodyPr>
-          <a:lstStyle/>
-          <a:p>
-            <a:pPr>
-              <a:defRPr sz="1500">
-                <a:solidFill>
-                  <a:srgbClr val="333333"/>
-                </a:solidFill>
-              </a:defRPr>
-            </a:pPr>
-            <a:r>
-              <a:t>   我来自上海。</a:t>
-            </a:r>
-          </a:p>
-        </p:txBody>
-      </p:sp>
-      <p:sp>
-        <p:nvSpPr>
-          <p:cNvPr id="15" name="TextBox 14"/>
-          <p:cNvSpPr txBox="1"/>
-          <p:nvPr/>
-        </p:nvSpPr>
-        <p:spPr>
-          <a:xfrm>
-            <a:off x="7772400" y="6583680"/>
-            <a:ext cx="1188720" cy="274320"/>
-          </a:xfrm>
-          <a:prstGeom prst="rect">
-            <a:avLst/>
-          </a:prstGeom>
-          <a:noFill/>
-        </p:spPr>
-        <p:txBody>
-          <a:bodyPr wrap="none">
-            <a:spAutoFit/>
-          </a:bodyPr>
-          <a:lstStyle/>
-          <a:p>
-            <a:pPr algn="r">
-              <a:defRPr sz="1100">
-                <a:solidFill>
-                  <a:srgbClr val="A0A0A0"/>
-                </a:solidFill>
-              </a:defRPr>
-            </a:pPr>
-            <a:r>
-              <a:t>Day1-L1/12</a:t>
+              <a:t>День 1/84</a:t>
             </a:r>
           </a:p>
         </p:txBody>
@@ -4946,7 +3904,7 @@
               </a:defRPr>
             </a:pPr>
             <a:r>
-              <a:t>Imenitelny padezh</a:t>
+              <a:t>Именительный падеж</a:t>
             </a:r>
           </a:p>
         </p:txBody>
@@ -4981,7 +3939,7 @@
               </a:defRPr>
             </a:pPr>
             <a:r>
-              <a:t>第1格 = 主格，表示"谁/什么"</a:t>
+              <a:t>第1格 = 主格，表示«谁/什么»</a:t>
             </a:r>
           </a:p>
         </p:txBody>
@@ -5029,8 +3987,8 @@
         </p:nvSpPr>
         <p:spPr>
           <a:xfrm>
-            <a:off x="457200" y="2240280"/>
-            <a:ext cx="8229600" cy="548640"/>
+            <a:off x="457200" y="2212848"/>
+            <a:ext cx="8229600" cy="502920"/>
           </a:xfrm>
           <a:prstGeom prst="roundRect">
             <a:avLst/>
@@ -5061,14 +4019,14 @@
           <a:lstStyle/>
           <a:p>
             <a:pPr algn="ctr">
-              <a:defRPr sz="1600" b="0">
+              <a:defRPr sz="1500">
                 <a:solidFill>
                   <a:srgbClr val="FFFFFF"/>
                 </a:solidFill>
               </a:defRPr>
             </a:pPr>
             <a:r>
-              <a:t>Student (学生) - etot student uchitsya.</a:t>
+              <a:t>Студент (学生) — Этот студент учится. (这个学生在学习)</a:t>
             </a:r>
           </a:p>
         </p:txBody>
@@ -5081,8 +4039,8 @@
         </p:nvSpPr>
         <p:spPr>
           <a:xfrm>
-            <a:off x="457200" y="2926080"/>
-            <a:ext cx="8229600" cy="548640"/>
+            <a:off x="457200" y="2852928"/>
+            <a:ext cx="8229600" cy="502920"/>
           </a:xfrm>
           <a:prstGeom prst="roundRect">
             <a:avLst/>
@@ -5113,14 +4071,14 @@
           <a:lstStyle/>
           <a:p>
             <a:pPr algn="ctr">
-              <a:defRPr sz="1600" b="0">
+              <a:defRPr sz="1500">
                 <a:solidFill>
                   <a:srgbClr val="FFFFFF"/>
                 </a:solidFill>
               </a:defRPr>
             </a:pPr>
             <a:r>
-              <a:t>Kniga (书) - eta kniga ochen interesnaya.</a:t>
+              <a:t>Книга (书) — Эта книга интересная. (这本书很有趣)</a:t>
             </a:r>
           </a:p>
         </p:txBody>
@@ -5133,7 +4091,7 @@
         </p:nvSpPr>
         <p:spPr>
           <a:xfrm>
-            <a:off x="457200" y="3611880"/>
+            <a:off x="457200" y="3493008"/>
             <a:ext cx="8229600" cy="457200"/>
           </a:xfrm>
           <a:prstGeom prst="roundRect">
@@ -5165,7 +4123,7 @@
           <a:lstStyle/>
           <a:p>
             <a:pPr algn="ctr">
-              <a:defRPr sz="1400" b="0">
+              <a:defRPr sz="1400">
                 <a:solidFill>
                   <a:srgbClr val="FFFFFF"/>
                 </a:solidFill>
@@ -5207,7 +4165,7 @@
               </a:defRPr>
             </a:pPr>
             <a:r>
-              <a:t>Day1-L1/12</a:t>
+              <a:t>День 1/84</a:t>
             </a:r>
           </a:p>
         </p:txBody>
@@ -5338,7 +4296,7 @@
               </a:defRPr>
             </a:pPr>
             <a:r>
-              <a:t>Roditelny padezh</a:t>
+              <a:t>Родительный падеж</a:t>
             </a:r>
           </a:p>
         </p:txBody>
@@ -5373,7 +4331,7 @@
               </a:defRPr>
             </a:pPr>
             <a:r>
-              <a:t>第2格主要表示"所属"关系，相当于中文的"的"：</a:t>
+              <a:t>第2格主要表示«所属»关系，相当于中文的«的»：</a:t>
             </a:r>
           </a:p>
         </p:txBody>
@@ -5408,7 +4366,7 @@
               </a:defRPr>
             </a:pPr>
             <a:r>
-              <a:t>Eto kniga studenta. = 这是学生的书。</a:t>
+              <a:t>Это книга студента. = 这是学生的书。</a:t>
             </a:r>
           </a:p>
         </p:txBody>
@@ -5421,7 +4379,7 @@
         </p:nvSpPr>
         <p:spPr>
           <a:xfrm>
-            <a:off x="457200" y="2240280"/>
+            <a:off x="457200" y="2212848"/>
             <a:ext cx="8229600" cy="365760"/>
           </a:xfrm>
           <a:prstGeom prst="rect">
@@ -5443,7 +4401,7 @@
               </a:defRPr>
             </a:pPr>
             <a:r>
-              <a:t>Eto dom brata. = 这是弟弟的房子。</a:t>
+              <a:t>Это дом брата. = 这是弟弟的房子。</a:t>
             </a:r>
           </a:p>
         </p:txBody>
@@ -5456,7 +4414,7 @@
         </p:nvSpPr>
         <p:spPr>
           <a:xfrm>
-            <a:off x="457200" y="2651760"/>
+            <a:off x="457200" y="2596896"/>
             <a:ext cx="8229600" cy="365760"/>
           </a:xfrm>
           <a:prstGeom prst="rect">
@@ -5478,7 +4436,7 @@
               </a:defRPr>
             </a:pPr>
             <a:r>
-              <a:t>第2格还表示'来自'：</a:t>
+              <a:t>第2格还表示«来自»：</a:t>
             </a:r>
           </a:p>
         </p:txBody>
@@ -5491,7 +4449,7 @@
         </p:nvSpPr>
         <p:spPr>
           <a:xfrm>
-            <a:off x="457200" y="3017520"/>
+            <a:off x="457200" y="2962656"/>
             <a:ext cx="8229600" cy="365760"/>
           </a:xfrm>
           <a:prstGeom prst="rect">
@@ -5513,7 +4471,7 @@
               </a:defRPr>
             </a:pPr>
             <a:r>
-              <a:t>Ya iz Kitaya. = 我来自中国。</a:t>
+              <a:t>Я из Китая. = 我来自中国。</a:t>
             </a:r>
           </a:p>
         </p:txBody>
@@ -5526,7 +4484,7 @@
         </p:nvSpPr>
         <p:spPr>
           <a:xfrm>
-            <a:off x="457200" y="3429000"/>
+            <a:off x="457200" y="3346703"/>
             <a:ext cx="8229600" cy="365760"/>
           </a:xfrm>
           <a:prstGeom prst="rect">
@@ -5548,7 +4506,7 @@
               </a:defRPr>
             </a:pPr>
             <a:r>
-              <a:t>Ona iz Moskvy. = 她来自莫斯科。</a:t>
+              <a:t>Она из Москвы. = 她来自莫斯科。</a:t>
             </a:r>
           </a:p>
         </p:txBody>
@@ -5561,7 +4519,7 @@
         </p:nvSpPr>
         <p:spPr>
           <a:xfrm>
-            <a:off x="457200" y="3840480"/>
+            <a:off x="457200" y="3730752"/>
             <a:ext cx="8229600" cy="457200"/>
           </a:xfrm>
           <a:prstGeom prst="roundRect">
@@ -5593,14 +4551,14 @@
           <a:lstStyle/>
           <a:p>
             <a:pPr algn="ctr">
-              <a:defRPr sz="1400" b="0">
+              <a:defRPr sz="1400">
                 <a:solidFill>
                   <a:srgbClr val="FFFFFF"/>
                 </a:solidFill>
               </a:defRPr>
             </a:pPr>
             <a:r>
-              <a:t>关键语法：iz + 第2格 = 来自某地</a:t>
+              <a:t>关键语法：из + 第2格 = 来自某地</a:t>
             </a:r>
           </a:p>
         </p:txBody>
@@ -5635,7 +4593,7 @@
               </a:defRPr>
             </a:pPr>
             <a:r>
-              <a:t>Day1-L1/12</a:t>
+              <a:t>День 1/84</a:t>
             </a:r>
           </a:p>
         </p:txBody>
@@ -5766,7 +4724,7 @@
               </a:defRPr>
             </a:pPr>
             <a:r>
-              <a:t>Sklonenie sushchestvitelnykh</a:t>
+              <a:t>Склонение существительных</a:t>
             </a:r>
           </a:p>
         </p:txBody>
@@ -5836,7 +4794,7 @@
               </a:defRPr>
             </a:pPr>
             <a:r>
-              <a:t>以 -a / -ya 结尾的阴性名词：</a:t>
+              <a:t>以 -а / -я 结尾的阴性名词：</a:t>
             </a:r>
           </a:p>
         </p:txBody>
@@ -5849,8 +4807,8 @@
         </p:nvSpPr>
         <p:spPr>
           <a:xfrm>
-            <a:off x="457200" y="2240280"/>
-            <a:ext cx="8229600" cy="548640"/>
+            <a:off x="457200" y="2212848"/>
+            <a:ext cx="8229600" cy="502920"/>
           </a:xfrm>
           <a:prstGeom prst="roundRect">
             <a:avLst/>
@@ -5881,14 +4839,14 @@
           <a:lstStyle/>
           <a:p>
             <a:pPr algn="ctr">
-              <a:defRPr sz="1600" b="0">
+              <a:defRPr sz="1500">
                 <a:solidFill>
                   <a:srgbClr val="FFFFFF"/>
                 </a:solidFill>
               </a:defRPr>
             </a:pPr>
             <a:r>
-              <a:t>kniga &gt; knigi (书)</a:t>
+              <a:t>книга → книги (书)</a:t>
             </a:r>
           </a:p>
         </p:txBody>
@@ -5901,8 +4859,8 @@
         </p:nvSpPr>
         <p:spPr>
           <a:xfrm>
-            <a:off x="457200" y="2926080"/>
-            <a:ext cx="8229600" cy="548640"/>
+            <a:off x="457200" y="2852928"/>
+            <a:ext cx="8229600" cy="502920"/>
           </a:xfrm>
           <a:prstGeom prst="roundRect">
             <a:avLst/>
@@ -5933,14 +4891,14 @@
           <a:lstStyle/>
           <a:p>
             <a:pPr algn="ctr">
-              <a:defRPr sz="1600" b="0">
+              <a:defRPr sz="1500">
                 <a:solidFill>
                   <a:srgbClr val="FFFFFF"/>
                 </a:solidFill>
               </a:defRPr>
             </a:pPr>
             <a:r>
-              <a:t>devushka &gt; devushki (姑娘)</a:t>
+              <a:t>девушка → девушки (姑娘)</a:t>
             </a:r>
           </a:p>
         </p:txBody>
@@ -5953,7 +4911,7 @@
         </p:nvSpPr>
         <p:spPr>
           <a:xfrm>
-            <a:off x="457200" y="3611880"/>
+            <a:off x="457200" y="3493008"/>
             <a:ext cx="8229600" cy="365760"/>
           </a:xfrm>
           <a:prstGeom prst="rect">
@@ -5988,7 +4946,7 @@
         </p:nvSpPr>
         <p:spPr>
           <a:xfrm>
-            <a:off x="457200" y="3977640"/>
+            <a:off x="457200" y="3858768"/>
             <a:ext cx="8229600" cy="365760"/>
           </a:xfrm>
           <a:prstGeom prst="rect">
@@ -6023,8 +4981,8 @@
         </p:nvSpPr>
         <p:spPr>
           <a:xfrm>
-            <a:off x="457200" y="4389120"/>
-            <a:ext cx="8229600" cy="548640"/>
+            <a:off x="457200" y="4242816"/>
+            <a:ext cx="8229600" cy="502920"/>
           </a:xfrm>
           <a:prstGeom prst="roundRect">
             <a:avLst/>
@@ -6055,14 +5013,14 @@
           <a:lstStyle/>
           <a:p>
             <a:pPr algn="ctr">
-              <a:defRPr sz="1600" b="0">
+              <a:defRPr sz="1500">
                 <a:solidFill>
                   <a:srgbClr val="FFFFFF"/>
                 </a:solidFill>
               </a:defRPr>
             </a:pPr>
             <a:r>
-              <a:t>dom &gt; doma (房子)</a:t>
+              <a:t>дом → дома (房子)</a:t>
             </a:r>
           </a:p>
         </p:txBody>
@@ -6075,8 +5033,8 @@
         </p:nvSpPr>
         <p:spPr>
           <a:xfrm>
-            <a:off x="457200" y="5074920"/>
-            <a:ext cx="8229600" cy="548640"/>
+            <a:off x="457200" y="4882896"/>
+            <a:ext cx="8229600" cy="502920"/>
           </a:xfrm>
           <a:prstGeom prst="roundRect">
             <a:avLst/>
@@ -6107,14 +5065,14 @@
           <a:lstStyle/>
           <a:p>
             <a:pPr algn="ctr">
-              <a:defRPr sz="1600" b="0">
+              <a:defRPr sz="1500">
                 <a:solidFill>
                   <a:srgbClr val="FFFFFF"/>
                 </a:solidFill>
               </a:defRPr>
             </a:pPr>
             <a:r>
-              <a:t>student &gt; studenta (学生)</a:t>
+              <a:t>студент → студента (学生)</a:t>
             </a:r>
           </a:p>
         </p:txBody>
@@ -6149,7 +5107,7 @@
               </a:defRPr>
             </a:pPr>
             <a:r>
-              <a:t>Day1-L1/12</a:t>
+              <a:t>День 1/84</a:t>
             </a:r>
           </a:p>
         </p:txBody>
@@ -6280,7 +5238,7 @@
               </a:defRPr>
             </a:pPr>
             <a:r>
-              <a:t>Primery skloneniya</a:t>
+              <a:t>Примеры склонения</a:t>
             </a:r>
           </a:p>
         </p:txBody>
@@ -6350,7 +5308,7 @@
               </a:defRPr>
             </a:pPr>
             <a:r>
-              <a:t>student &gt; studenta (学生的)</a:t>
+              <a:t>студдент → студента (学生的)</a:t>
             </a:r>
           </a:p>
         </p:txBody>
@@ -6363,7 +5321,7 @@
         </p:nvSpPr>
         <p:spPr>
           <a:xfrm>
-            <a:off x="457200" y="2240280"/>
+            <a:off x="457200" y="2212848"/>
             <a:ext cx="8229600" cy="365760"/>
           </a:xfrm>
           <a:prstGeom prst="rect">
@@ -6385,7 +5343,7 @@
               </a:defRPr>
             </a:pPr>
             <a:r>
-              <a:t>drug &gt; друга (朋友的)</a:t>
+              <a:t>друг → друга (朋友的)</a:t>
             </a:r>
           </a:p>
         </p:txBody>
@@ -6398,7 +5356,7 @@
         </p:nvSpPr>
         <p:spPr>
           <a:xfrm>
-            <a:off x="457200" y="2651760"/>
+            <a:off x="457200" y="2596896"/>
             <a:ext cx="8229600" cy="365760"/>
           </a:xfrm>
           <a:prstGeom prst="rect">
@@ -6420,7 +5378,7 @@
               </a:defRPr>
             </a:pPr>
             <a:r>
-              <a:t>vrach &gt; vracha (医生的)</a:t>
+              <a:t>врач → врача (医生的)</a:t>
             </a:r>
           </a:p>
         </p:txBody>
@@ -6433,7 +5391,7 @@
         </p:nvSpPr>
         <p:spPr>
           <a:xfrm>
-            <a:off x="457200" y="3063240"/>
+            <a:off x="457200" y="2980944"/>
             <a:ext cx="8229600" cy="365760"/>
           </a:xfrm>
           <a:prstGeom prst="rect">
@@ -6468,7 +5426,7 @@
         </p:nvSpPr>
         <p:spPr>
           <a:xfrm>
-            <a:off x="457200" y="3429000"/>
+            <a:off x="457200" y="3346703"/>
             <a:ext cx="8229600" cy="365760"/>
           </a:xfrm>
           <a:prstGeom prst="rect">
@@ -6490,7 +5448,7 @@
               </a:defRPr>
             </a:pPr>
             <a:r>
-              <a:t>kniga &gt; knigi (书的)</a:t>
+              <a:t>книга → книги (书的)</a:t>
             </a:r>
           </a:p>
         </p:txBody>
@@ -6503,7 +5461,7 @@
         </p:nvSpPr>
         <p:spPr>
           <a:xfrm>
-            <a:off x="457200" y="3840480"/>
+            <a:off x="457200" y="3730752"/>
             <a:ext cx="8229600" cy="365760"/>
           </a:xfrm>
           <a:prstGeom prst="rect">
@@ -6525,7 +5483,7 @@
               </a:defRPr>
             </a:pPr>
             <a:r>
-              <a:t>devushka &gt; devushki (姑娘的)</a:t>
+              <a:t>девушка → девушки (姑娘的)</a:t>
             </a:r>
           </a:p>
         </p:txBody>
@@ -6538,7 +5496,7 @@
         </p:nvSpPr>
         <p:spPr>
           <a:xfrm>
-            <a:off x="457200" y="4251960"/>
+            <a:off x="457200" y="4114800"/>
             <a:ext cx="8229600" cy="457200"/>
           </a:xfrm>
           <a:prstGeom prst="roundRect">
@@ -6570,14 +5528,14 @@
           <a:lstStyle/>
           <a:p>
             <a:pPr algn="ctr">
-              <a:defRPr sz="1400" b="0">
+              <a:defRPr sz="1400">
                 <a:solidFill>
                   <a:srgbClr val="FFFFFF"/>
                 </a:solidFill>
               </a:defRPr>
             </a:pPr>
             <a:r>
-              <a:t>规律：通常在词尾加 -a 或 -i</a:t>
+              <a:t>规律：通常在词尾加 -а 或 -и</a:t>
             </a:r>
           </a:p>
         </p:txBody>
@@ -6612,7 +5570,7 @@
               </a:defRPr>
             </a:pPr>
             <a:r>
-              <a:t>Day1-L1/12</a:t>
+              <a:t>День 1/84</a:t>
             </a:r>
           </a:p>
         </p:txBody>
@@ -6708,7 +5666,7 @@
               </a:defRPr>
             </a:pPr>
             <a:r>
-              <a:t>五、易错点：特殊结尾</a:t>
+              <a:t>五、数量词后的第2格</a:t>
             </a:r>
           </a:p>
         </p:txBody>
@@ -6743,7 +5701,7 @@
               </a:defRPr>
             </a:pPr>
             <a:r>
-              <a:t>Osobye sluchai</a:t>
+              <a:t>Родительный после числительных</a:t>
             </a:r>
           </a:p>
         </p:txBody>
@@ -6778,7 +5736,7 @@
               </a:defRPr>
             </a:pPr>
             <a:r>
-              <a:t>以 -t 结尾的动词名词：</a:t>
+              <a:t>数字2-4后名词用单数第2格：</a:t>
             </a:r>
           </a:p>
         </p:txBody>
@@ -6813,7 +5771,7 @@
               </a:defRPr>
             </a:pPr>
             <a:r>
-              <a:t>chitat &gt; chteniya (阅读的) - 特殊变化</a:t>
+              <a:t>два студента (两个学生)</a:t>
             </a:r>
           </a:p>
         </p:txBody>
@@ -6826,7 +5784,77 @@
         </p:nvSpPr>
         <p:spPr>
           <a:xfrm>
-            <a:off x="457200" y="2240280"/>
+            <a:off x="457200" y="2212848"/>
+            <a:ext cx="8229600" cy="365760"/>
+          </a:xfrm>
+          <a:prstGeom prst="rect">
+            <a:avLst/>
+          </a:prstGeom>
+          <a:noFill/>
+        </p:spPr>
+        <p:txBody>
+          <a:bodyPr wrap="none">
+            <a:spAutoFit/>
+          </a:bodyPr>
+          <a:lstStyle/>
+          <a:p>
+            <a:pPr>
+              <a:defRPr sz="1500">
+                <a:solidFill>
+                  <a:srgbClr val="333333"/>
+                </a:solidFill>
+              </a:defRPr>
+            </a:pPr>
+            <a:r>
+              <a:t>три книги (三本书)</a:t>
+            </a:r>
+          </a:p>
+        </p:txBody>
+      </p:sp>
+      <p:sp>
+        <p:nvSpPr>
+          <p:cNvPr id="8" name="TextBox 7"/>
+          <p:cNvSpPr txBox="1"/>
+          <p:nvPr/>
+        </p:nvSpPr>
+        <p:spPr>
+          <a:xfrm>
+            <a:off x="457200" y="2596896"/>
+            <a:ext cx="8229600" cy="365760"/>
+          </a:xfrm>
+          <a:prstGeom prst="rect">
+            <a:avLst/>
+          </a:prstGeom>
+          <a:noFill/>
+        </p:spPr>
+        <p:txBody>
+          <a:bodyPr wrap="none">
+            <a:spAutoFit/>
+          </a:bodyPr>
+          <a:lstStyle/>
+          <a:p>
+            <a:pPr>
+              <a:defRPr sz="1500">
+                <a:solidFill>
+                  <a:srgbClr val="333333"/>
+                </a:solidFill>
+              </a:defRPr>
+            </a:pPr>
+            <a:r>
+              <a:t>четыре девушки (四个姑娘)</a:t>
+            </a:r>
+          </a:p>
+        </p:txBody>
+      </p:sp>
+      <p:sp>
+        <p:nvSpPr>
+          <p:cNvPr id="9" name="TextBox 8"/>
+          <p:cNvSpPr txBox="1"/>
+          <p:nvPr/>
+        </p:nvSpPr>
+        <p:spPr>
+          <a:xfrm>
+            <a:off x="457200" y="2980944"/>
             <a:ext cx="8229600" cy="365760"/>
           </a:xfrm>
           <a:prstGeom prst="rect">
@@ -6848,20 +5876,20 @@
               </a:defRPr>
             </a:pPr>
             <a:r>
-              <a:t>以 -ch 结尾的名词：</a:t>
-            </a:r>
-          </a:p>
-        </p:txBody>
-      </p:sp>
-      <p:sp>
-        <p:nvSpPr>
-          <p:cNvPr id="8" name="TextBox 7"/>
-          <p:cNvSpPr txBox="1"/>
-          <p:nvPr/>
-        </p:nvSpPr>
-        <p:spPr>
-          <a:xfrm>
-            <a:off x="457200" y="2606040"/>
+              <a:t>数字5以上名词用复数第2格：</a:t>
+            </a:r>
+          </a:p>
+        </p:txBody>
+      </p:sp>
+      <p:sp>
+        <p:nvSpPr>
+          <p:cNvPr id="10" name="TextBox 9"/>
+          <p:cNvSpPr txBox="1"/>
+          <p:nvPr/>
+        </p:nvSpPr>
+        <p:spPr>
+          <a:xfrm>
+            <a:off x="457200" y="3346703"/>
             <a:ext cx="8229600" cy="365760"/>
           </a:xfrm>
           <a:prstGeom prst="rect">
@@ -6883,20 +5911,20 @@
               </a:defRPr>
             </a:pPr>
             <a:r>
-              <a:t>noch &gt; nochi (夜晚的) - ch &gt; sh</a:t>
-            </a:r>
-          </a:p>
-        </p:txBody>
-      </p:sp>
-      <p:sp>
-        <p:nvSpPr>
-          <p:cNvPr id="9" name="Rounded Rectangle 8"/>
+              <a:t>пять студентов (五个学生)</a:t>
+            </a:r>
+          </a:p>
+        </p:txBody>
+      </p:sp>
+      <p:sp>
+        <p:nvSpPr>
+          <p:cNvPr id="11" name="Rounded Rectangle 10"/>
           <p:cNvSpPr/>
           <p:nvPr/>
         </p:nvSpPr>
         <p:spPr>
           <a:xfrm>
-            <a:off x="457200" y="3017520"/>
+            <a:off x="457200" y="3730752"/>
             <a:ext cx="8229600" cy="457200"/>
           </a:xfrm>
           <a:prstGeom prst="roundRect">
@@ -6928,21 +5956,21 @@
           <a:lstStyle/>
           <a:p>
             <a:pPr algn="ctr">
-              <a:defRPr sz="1400" b="0">
+              <a:defRPr sz="1400">
                 <a:solidFill>
                   <a:srgbClr val="FFFFFF"/>
                 </a:solidFill>
               </a:defRPr>
             </a:pPr>
             <a:r>
-              <a:t>注意：这类词的变化不规则，需要单独记忆！</a:t>
-            </a:r>
-          </a:p>
-        </p:txBody>
-      </p:sp>
-      <p:sp>
-        <p:nvSpPr>
-          <p:cNvPr id="10" name="TextBox 9"/>
+              <a:t>关键：1之后单数，2-4单数第2格，5+复数第2格</a:t>
+            </a:r>
+          </a:p>
+        </p:txBody>
+      </p:sp>
+      <p:sp>
+        <p:nvSpPr>
+          <p:cNvPr id="12" name="TextBox 11"/>
           <p:cNvSpPr txBox="1"/>
           <p:nvPr/>
         </p:nvSpPr>
@@ -6970,7 +5998,7 @@
               </a:defRPr>
             </a:pPr>
             <a:r>
-              <a:t>Day1-L1/12</a:t>
+              <a:t>День 1/84</a:t>
             </a:r>
           </a:p>
         </p:txBody>
@@ -7066,7 +6094,7 @@
               </a:defRPr>
             </a:pPr>
             <a:r>
-              <a:t>六、数量词后的第2格</a:t>
+              <a:t>六、第2格否定用法</a:t>
             </a:r>
           </a:p>
         </p:txBody>
@@ -7101,7 +6129,7 @@
               </a:defRPr>
             </a:pPr>
             <a:r>
-              <a:t>Roditelny posle chiselnykh</a:t>
+              <a:t>Отрицательный родительный</a:t>
             </a:r>
           </a:p>
         </p:txBody>
@@ -7136,7 +6164,7 @@
               </a:defRPr>
             </a:pPr>
             <a:r>
-              <a:t>数字2-4后名词用单数第2格：</a:t>
+              <a:t>否定«没有/不是»时使用第2格：</a:t>
             </a:r>
           </a:p>
         </p:txBody>
@@ -7171,7 +6199,7 @@
               </a:defRPr>
             </a:pPr>
             <a:r>
-              <a:t>dva studenta (两个学生)</a:t>
+              <a:t>У меня нет времени. = 我没有时间。</a:t>
             </a:r>
           </a:p>
         </p:txBody>
@@ -7184,7 +6212,7 @@
         </p:nvSpPr>
         <p:spPr>
           <a:xfrm>
-            <a:off x="457200" y="2240280"/>
+            <a:off x="457200" y="2212848"/>
             <a:ext cx="8229600" cy="365760"/>
           </a:xfrm>
           <a:prstGeom prst="rect">
@@ -7206,7 +6234,7 @@
               </a:defRPr>
             </a:pPr>
             <a:r>
-              <a:t>tri knigi (三本书)</a:t>
+              <a:t>Это не моя книга. = 这不是我的书。</a:t>
             </a:r>
           </a:p>
         </p:txBody>
@@ -7219,7 +6247,42 @@
         </p:nvSpPr>
         <p:spPr>
           <a:xfrm>
-            <a:off x="457200" y="2651760"/>
+            <a:off x="457200" y="2596896"/>
+            <a:ext cx="8229600" cy="365760"/>
+          </a:xfrm>
+          <a:prstGeom prst="rect">
+            <a:avLst/>
+          </a:prstGeom>
+          <a:noFill/>
+        </p:spPr>
+        <p:txBody>
+          <a:bodyPr wrap="none">
+            <a:spAutoFit/>
+          </a:bodyPr>
+          <a:lstStyle/>
+          <a:p>
+            <a:pPr>
+              <a:defRPr sz="1600" b="1">
+                <a:solidFill>
+                  <a:srgbClr val="1E3C72"/>
+                </a:solidFill>
+              </a:defRPr>
+            </a:pPr>
+            <a:r>
+              <a:t>нет = 没有（现在时）</a:t>
+            </a:r>
+          </a:p>
+        </p:txBody>
+      </p:sp>
+      <p:sp>
+        <p:nvSpPr>
+          <p:cNvPr id="9" name="TextBox 8"/>
+          <p:cNvSpPr txBox="1"/>
+          <p:nvPr/>
+        </p:nvSpPr>
+        <p:spPr>
+          <a:xfrm>
+            <a:off x="457200" y="2962656"/>
             <a:ext cx="8229600" cy="365760"/>
           </a:xfrm>
           <a:prstGeom prst="rect">
@@ -7241,42 +6304,7 @@
               </a:defRPr>
             </a:pPr>
             <a:r>
-              <a:t>chetyre devushki (四个姑娘)</a:t>
-            </a:r>
-          </a:p>
-        </p:txBody>
-      </p:sp>
-      <p:sp>
-        <p:nvSpPr>
-          <p:cNvPr id="9" name="TextBox 8"/>
-          <p:cNvSpPr txBox="1"/>
-          <p:nvPr/>
-        </p:nvSpPr>
-        <p:spPr>
-          <a:xfrm>
-            <a:off x="457200" y="3063240"/>
-            <a:ext cx="8229600" cy="365760"/>
-          </a:xfrm>
-          <a:prstGeom prst="rect">
-            <a:avLst/>
-          </a:prstGeom>
-          <a:noFill/>
-        </p:spPr>
-        <p:txBody>
-          <a:bodyPr wrap="none">
-            <a:spAutoFit/>
-          </a:bodyPr>
-          <a:lstStyle/>
-          <a:p>
-            <a:pPr>
-              <a:defRPr sz="1600" b="1">
-                <a:solidFill>
-                  <a:srgbClr val="1E3C72"/>
-                </a:solidFill>
-              </a:defRPr>
-            </a:pPr>
-            <a:r>
-              <a:t>数字5以上名词用复数第2格：</a:t>
+              <a:t>не было = 没有（过去时）</a:t>
             </a:r>
           </a:p>
         </p:txBody>
@@ -7289,7 +6317,7 @@
         </p:nvSpPr>
         <p:spPr>
           <a:xfrm>
-            <a:off x="457200" y="3429000"/>
+            <a:off x="457200" y="3346703"/>
             <a:ext cx="8229600" cy="365760"/>
           </a:xfrm>
           <a:prstGeom prst="rect">
@@ -7311,7 +6339,7 @@
               </a:defRPr>
             </a:pPr>
             <a:r>
-              <a:t>pyat studentov (五个学生)</a:t>
+              <a:t>не будет = 没有（将来时）</a:t>
             </a:r>
           </a:p>
         </p:txBody>
@@ -7324,7 +6352,7 @@
         </p:nvSpPr>
         <p:spPr>
           <a:xfrm>
-            <a:off x="457200" y="3840480"/>
+            <a:off x="457200" y="3730752"/>
             <a:ext cx="8229600" cy="457200"/>
           </a:xfrm>
           <a:prstGeom prst="roundRect">
@@ -7356,14 +6384,14 @@
           <a:lstStyle/>
           <a:p>
             <a:pPr algn="ctr">
-              <a:defRPr sz="1400" b="0">
+              <a:defRPr sz="1400">
                 <a:solidFill>
                   <a:srgbClr val="FFFFFF"/>
                 </a:solidFill>
               </a:defRPr>
             </a:pPr>
             <a:r>
-              <a:t>关键：1之后单数，2-4单数第2格，5+复数第2格</a:t>
+              <a:t>结构：У + 人称 + нет + 物</a:t>
             </a:r>
           </a:p>
         </p:txBody>
@@ -7398,7 +6426,7 @@
               </a:defRPr>
             </a:pPr>
             <a:r>
-              <a:t>Day1-L1/12</a:t>
+              <a:t>День 1/84</a:t>
             </a:r>
           </a:p>
         </p:txBody>
@@ -7494,7 +6522,7 @@
               </a:defRPr>
             </a:pPr>
             <a:r>
-              <a:t>七、第2格否定用法</a:t>
+              <a:t>七、阅读理解练习</a:t>
             </a:r>
           </a:p>
         </p:txBody>
@@ -7529,7 +6557,7 @@
               </a:defRPr>
             </a:pPr>
             <a:r>
-              <a:t>Otritsatelny roditelny</a:t>
+              <a:t>Чтение с пониманием</a:t>
             </a:r>
           </a:p>
         </p:txBody>
@@ -7557,14 +6585,14 @@
           <a:lstStyle/>
           <a:p>
             <a:pPr>
-              <a:defRPr sz="1600" b="1">
-                <a:solidFill>
-                  <a:srgbClr val="1E3C72"/>
-                </a:solidFill>
-              </a:defRPr>
-            </a:pPr>
-            <a:r>
-              <a:t>否定"没有/不是"时使用第2格：</a:t>
+              <a:defRPr sz="1500">
+                <a:solidFill>
+                  <a:srgbClr val="333333"/>
+                </a:solidFill>
+              </a:defRPr>
+            </a:pPr>
+            <a:r>
+              <a:t>Меня зовут Анна. Я из Москвы. Я студентка университета. Мой брат тоже студент. Он из Санкт-Петербурга.</a:t>
             </a:r>
           </a:p>
         </p:txBody>
@@ -7577,7 +6605,7 @@
         </p:nvSpPr>
         <p:spPr>
           <a:xfrm>
-            <a:off x="457200" y="1828800"/>
+            <a:off x="457200" y="1847088"/>
             <a:ext cx="8229600" cy="365760"/>
           </a:xfrm>
           <a:prstGeom prst="rect">
@@ -7598,9 +6626,6 @@
                 </a:solidFill>
               </a:defRPr>
             </a:pPr>
-            <a:r>
-              <a:t>U menya net vremeni. = 我没有时间。</a:t>
-            </a:r>
           </a:p>
         </p:txBody>
       </p:sp>
@@ -7612,7 +6637,42 @@
         </p:nvSpPr>
         <p:spPr>
           <a:xfrm>
-            <a:off x="457200" y="2240280"/>
+            <a:off x="457200" y="2231136"/>
+            <a:ext cx="8229600" cy="365760"/>
+          </a:xfrm>
+          <a:prstGeom prst="rect">
+            <a:avLst/>
+          </a:prstGeom>
+          <a:noFill/>
+        </p:spPr>
+        <p:txBody>
+          <a:bodyPr wrap="none">
+            <a:spAutoFit/>
+          </a:bodyPr>
+          <a:lstStyle/>
+          <a:p>
+            <a:pPr>
+              <a:defRPr sz="1600" b="1">
+                <a:solidFill>
+                  <a:srgbClr val="1E3C72"/>
+                </a:solidFill>
+              </a:defRPr>
+            </a:pPr>
+            <a:r>
+              <a:t>请回答：</a:t>
+            </a:r>
+          </a:p>
+        </p:txBody>
+      </p:sp>
+      <p:sp>
+        <p:nvSpPr>
+          <p:cNvPr id="8" name="TextBox 7"/>
+          <p:cNvSpPr txBox="1"/>
+          <p:nvPr/>
+        </p:nvSpPr>
+        <p:spPr>
+          <a:xfrm>
+            <a:off x="457200" y="2596896"/>
             <a:ext cx="8229600" cy="365760"/>
           </a:xfrm>
           <a:prstGeom prst="rect">
@@ -7634,42 +6694,7 @@
               </a:defRPr>
             </a:pPr>
             <a:r>
-              <a:t>Eto ne moya kniga. = 这不是我的书。</a:t>
-            </a:r>
-          </a:p>
-        </p:txBody>
-      </p:sp>
-      <p:sp>
-        <p:nvSpPr>
-          <p:cNvPr id="8" name="TextBox 7"/>
-          <p:cNvSpPr txBox="1"/>
-          <p:nvPr/>
-        </p:nvSpPr>
-        <p:spPr>
-          <a:xfrm>
-            <a:off x="457200" y="2651760"/>
-            <a:ext cx="8229600" cy="365760"/>
-          </a:xfrm>
-          <a:prstGeom prst="rect">
-            <a:avLst/>
-          </a:prstGeom>
-          <a:noFill/>
-        </p:spPr>
-        <p:txBody>
-          <a:bodyPr wrap="none">
-            <a:spAutoFit/>
-          </a:bodyPr>
-          <a:lstStyle/>
-          <a:p>
-            <a:pPr>
-              <a:defRPr sz="1600" b="1">
-                <a:solidFill>
-                  <a:srgbClr val="1E3C72"/>
-                </a:solidFill>
-              </a:defRPr>
-            </a:pPr>
-            <a:r>
-              <a:t>net = 没有（现在时）</a:t>
+              <a:t>1. Как её зовут? (她叫什么？)</a:t>
             </a:r>
           </a:p>
         </p:txBody>
@@ -7682,7 +6707,7 @@
         </p:nvSpPr>
         <p:spPr>
           <a:xfrm>
-            <a:off x="457200" y="3017520"/>
+            <a:off x="457200" y="2980944"/>
             <a:ext cx="8229600" cy="365760"/>
           </a:xfrm>
           <a:prstGeom prst="rect">
@@ -7704,7 +6729,7 @@
               </a:defRPr>
             </a:pPr>
             <a:r>
-              <a:t>ne bylo = 没有（过去时）</a:t>
+              <a:t>2. Откуда Анна? (她来自哪里？)</a:t>
             </a:r>
           </a:p>
         </p:txBody>
@@ -7717,7 +6742,7 @@
         </p:nvSpPr>
         <p:spPr>
           <a:xfrm>
-            <a:off x="457200" y="3429000"/>
+            <a:off x="457200" y="3364991"/>
             <a:ext cx="8229600" cy="365760"/>
           </a:xfrm>
           <a:prstGeom prst="rect">
@@ -7739,7 +6764,7 @@
               </a:defRPr>
             </a:pPr>
             <a:r>
-              <a:t>ne budet = 没有（将来时）</a:t>
+              <a:t>3. Кто её брат? (她弟弟是做什么的？)</a:t>
             </a:r>
           </a:p>
         </p:txBody>
@@ -7752,7 +6777,7 @@
         </p:nvSpPr>
         <p:spPr>
           <a:xfrm>
-            <a:off x="457200" y="3840480"/>
+            <a:off x="457200" y="3749039"/>
             <a:ext cx="8229600" cy="457200"/>
           </a:xfrm>
           <a:prstGeom prst="roundRect">
@@ -7784,14 +6809,14 @@
           <a:lstStyle/>
           <a:p>
             <a:pPr algn="ctr">
-              <a:defRPr sz="1400" b="0">
+              <a:defRPr sz="1400">
                 <a:solidFill>
                   <a:srgbClr val="FFFFFF"/>
                 </a:solidFill>
               </a:defRPr>
             </a:pPr>
             <a:r>
-              <a:t>结构：U + 人称 + net + 物</a:t>
+              <a:t>提示：студентка = 女大学生，университет = 大学</a:t>
             </a:r>
           </a:p>
         </p:txBody>
@@ -7826,7 +6851,7 @@
               </a:defRPr>
             </a:pPr>
             <a:r>
-              <a:t>Day1-L1/12</a:t>
+              <a:t>День 1/84</a:t>
             </a:r>
           </a:p>
         </p:txBody>
@@ -7922,7 +6947,7 @@
               </a:defRPr>
             </a:pPr>
             <a:r>
-              <a:t>八、阅读理解练习</a:t>
+              <a:t>八、翻译练习</a:t>
             </a:r>
           </a:p>
         </p:txBody>
@@ -7957,7 +6982,7 @@
               </a:defRPr>
             </a:pPr>
             <a:r>
-              <a:t>Chteniye s ponimaniyem</a:t>
+              <a:t>Перевод</a:t>
             </a:r>
           </a:p>
         </p:txBody>
@@ -7985,14 +7010,14 @@
           <a:lstStyle/>
           <a:p>
             <a:pPr>
-              <a:defRPr sz="1500">
-                <a:solidFill>
-                  <a:srgbClr val="333333"/>
-                </a:solidFill>
-              </a:defRPr>
-            </a:pPr>
-            <a:r>
-              <a:t>Menya zovut Anna. Ya iz Moskvy. Ya studentka universiteta. Moy brat tozhe student. On iz Sankt-Peterburga.</a:t>
+              <a:defRPr sz="1600" b="1">
+                <a:solidFill>
+                  <a:srgbClr val="1E3C72"/>
+                </a:solidFill>
+              </a:defRPr>
+            </a:pPr>
+            <a:r>
+              <a:t>中译俄练习：</a:t>
             </a:r>
           </a:p>
         </p:txBody>
@@ -8005,7 +7030,7 @@
         </p:nvSpPr>
         <p:spPr>
           <a:xfrm>
-            <a:off x="457200" y="1874520"/>
+            <a:off x="457200" y="1828800"/>
             <a:ext cx="8229600" cy="365760"/>
           </a:xfrm>
           <a:prstGeom prst="rect">
@@ -8026,6 +7051,9 @@
                 </a:solidFill>
               </a:defRPr>
             </a:pPr>
+            <a:r>
+              <a:t>1. 这是我朋友的书。</a:t>
+            </a:r>
           </a:p>
         </p:txBody>
       </p:sp>
@@ -8037,7 +7065,109 @@
         </p:nvSpPr>
         <p:spPr>
           <a:xfrm>
-            <a:off x="457200" y="2286000"/>
+            <a:off x="457200" y="2212848"/>
+            <a:ext cx="8229600" cy="365760"/>
+          </a:xfrm>
+          <a:prstGeom prst="rect">
+            <a:avLst/>
+          </a:prstGeom>
+          <a:noFill/>
+        </p:spPr>
+        <p:txBody>
+          <a:bodyPr wrap="none">
+            <a:spAutoFit/>
+          </a:bodyPr>
+          <a:lstStyle/>
+          <a:p>
+            <a:pPr>
+              <a:defRPr sz="1500">
+                <a:solidFill>
+                  <a:srgbClr val="333333"/>
+                </a:solidFill>
+              </a:defRPr>
+            </a:pPr>
+            <a:r>
+              <a:t>2. 我来自中国。</a:t>
+            </a:r>
+          </a:p>
+        </p:txBody>
+      </p:sp>
+      <p:sp>
+        <p:nvSpPr>
+          <p:cNvPr id="8" name="TextBox 7"/>
+          <p:cNvSpPr txBox="1"/>
+          <p:nvPr/>
+        </p:nvSpPr>
+        <p:spPr>
+          <a:xfrm>
+            <a:off x="457200" y="2596896"/>
+            <a:ext cx="8229600" cy="365760"/>
+          </a:xfrm>
+          <a:prstGeom prst="rect">
+            <a:avLst/>
+          </a:prstGeom>
+          <a:noFill/>
+        </p:spPr>
+        <p:txBody>
+          <a:bodyPr wrap="none">
+            <a:spAutoFit/>
+          </a:bodyPr>
+          <a:lstStyle/>
+          <a:p>
+            <a:pPr>
+              <a:defRPr sz="1500">
+                <a:solidFill>
+                  <a:srgbClr val="333333"/>
+                </a:solidFill>
+              </a:defRPr>
+            </a:pPr>
+            <a:r>
+              <a:t>3. 她没有时间。</a:t>
+            </a:r>
+          </a:p>
+        </p:txBody>
+      </p:sp>
+      <p:sp>
+        <p:nvSpPr>
+          <p:cNvPr id="9" name="TextBox 8"/>
+          <p:cNvSpPr txBox="1"/>
+          <p:nvPr/>
+        </p:nvSpPr>
+        <p:spPr>
+          <a:xfrm>
+            <a:off x="457200" y="2980944"/>
+            <a:ext cx="8229600" cy="365760"/>
+          </a:xfrm>
+          <a:prstGeom prst="rect">
+            <a:avLst/>
+          </a:prstGeom>
+          <a:noFill/>
+        </p:spPr>
+        <p:txBody>
+          <a:bodyPr wrap="none">
+            <a:spAutoFit/>
+          </a:bodyPr>
+          <a:lstStyle/>
+          <a:p>
+            <a:pPr>
+              <a:defRPr sz="1500">
+                <a:solidFill>
+                  <a:srgbClr val="333333"/>
+                </a:solidFill>
+              </a:defRPr>
+            </a:pPr>
+          </a:p>
+        </p:txBody>
+      </p:sp>
+      <p:sp>
+        <p:nvSpPr>
+          <p:cNvPr id="10" name="TextBox 9"/>
+          <p:cNvSpPr txBox="1"/>
+          <p:nvPr/>
+        </p:nvSpPr>
+        <p:spPr>
+          <a:xfrm>
+            <a:off x="457200" y="3364991"/>
             <a:ext cx="8229600" cy="365760"/>
           </a:xfrm>
           <a:prstGeom prst="rect">
@@ -8059,20 +7189,20 @@
               </a:defRPr>
             </a:pPr>
             <a:r>
-              <a:t>请回答：</a:t>
-            </a:r>
-          </a:p>
-        </p:txBody>
-      </p:sp>
-      <p:sp>
-        <p:nvSpPr>
-          <p:cNvPr id="8" name="TextBox 7"/>
-          <p:cNvSpPr txBox="1"/>
-          <p:nvPr/>
-        </p:nvSpPr>
-        <p:spPr>
-          <a:xfrm>
-            <a:off x="457200" y="2651760"/>
+              <a:t>参考答案：</a:t>
+            </a:r>
+          </a:p>
+        </p:txBody>
+      </p:sp>
+      <p:sp>
+        <p:nvSpPr>
+          <p:cNvPr id="11" name="TextBox 10"/>
+          <p:cNvSpPr txBox="1"/>
+          <p:nvPr/>
+        </p:nvSpPr>
+        <p:spPr>
+          <a:xfrm>
+            <a:off x="457200" y="3730752"/>
             <a:ext cx="8229600" cy="365760"/>
           </a:xfrm>
           <a:prstGeom prst="rect">
@@ -8094,20 +7224,20 @@
               </a:defRPr>
             </a:pPr>
             <a:r>
-              <a:t>1. Kak eye zovut? (她叫什么？)</a:t>
-            </a:r>
-          </a:p>
-        </p:txBody>
-      </p:sp>
-      <p:sp>
-        <p:nvSpPr>
-          <p:cNvPr id="9" name="TextBox 8"/>
-          <p:cNvSpPr txBox="1"/>
-          <p:nvPr/>
-        </p:nvSpPr>
-        <p:spPr>
-          <a:xfrm>
-            <a:off x="457200" y="3063240"/>
+              <a:t>1. Это книга моего друга.</a:t>
+            </a:r>
+          </a:p>
+        </p:txBody>
+      </p:sp>
+      <p:sp>
+        <p:nvSpPr>
+          <p:cNvPr id="12" name="TextBox 11"/>
+          <p:cNvSpPr txBox="1"/>
+          <p:nvPr/>
+        </p:nvSpPr>
+        <p:spPr>
+          <a:xfrm>
+            <a:off x="457200" y="4114800"/>
             <a:ext cx="8229600" cy="365760"/>
           </a:xfrm>
           <a:prstGeom prst="rect">
@@ -8129,20 +7259,20 @@
               </a:defRPr>
             </a:pPr>
             <a:r>
-              <a:t>2. Otkuda Anna? (她来自哪里？)</a:t>
-            </a:r>
-          </a:p>
-        </p:txBody>
-      </p:sp>
-      <p:sp>
-        <p:nvSpPr>
-          <p:cNvPr id="10" name="TextBox 9"/>
-          <p:cNvSpPr txBox="1"/>
-          <p:nvPr/>
-        </p:nvSpPr>
-        <p:spPr>
-          <a:xfrm>
-            <a:off x="457200" y="3474720"/>
+              <a:t>2. Я из Китая.</a:t>
+            </a:r>
+          </a:p>
+        </p:txBody>
+      </p:sp>
+      <p:sp>
+        <p:nvSpPr>
+          <p:cNvPr id="13" name="TextBox 12"/>
+          <p:cNvSpPr txBox="1"/>
+          <p:nvPr/>
+        </p:nvSpPr>
+        <p:spPr>
+          <a:xfrm>
+            <a:off x="457200" y="4498848"/>
             <a:ext cx="8229600" cy="365760"/>
           </a:xfrm>
           <a:prstGeom prst="rect">
@@ -8164,66 +7294,14 @@
               </a:defRPr>
             </a:pPr>
             <a:r>
-              <a:t>3. Kto eye brat? (她弟弟是做什么的？)</a:t>
-            </a:r>
-          </a:p>
-        </p:txBody>
-      </p:sp>
-      <p:sp>
-        <p:nvSpPr>
-          <p:cNvPr id="11" name="Rounded Rectangle 10"/>
-          <p:cNvSpPr/>
-          <p:nvPr/>
-        </p:nvSpPr>
-        <p:spPr>
-          <a:xfrm>
-            <a:off x="457200" y="3886200"/>
-            <a:ext cx="8229600" cy="457200"/>
-          </a:xfrm>
-          <a:prstGeom prst="roundRect">
-            <a:avLst/>
-          </a:prstGeom>
-          <a:solidFill>
-            <a:srgbClr val="B48C32"/>
-          </a:solidFill>
-          <a:ln>
-            <a:noFill/>
-          </a:ln>
-        </p:spPr>
-        <p:style>
-          <a:lnRef idx="1">
-            <a:schemeClr val="accent1"/>
-          </a:lnRef>
-          <a:fillRef idx="3">
-            <a:schemeClr val="accent1"/>
-          </a:fillRef>
-          <a:effectRef idx="2">
-            <a:schemeClr val="accent1"/>
-          </a:effectRef>
-          <a:fontRef idx="minor">
-            <a:schemeClr val="lt1"/>
-          </a:fontRef>
-        </p:style>
-        <p:txBody>
-          <a:bodyPr rtlCol="0" anchor="ctr" wrap="square"/>
-          <a:lstStyle/>
-          <a:p>
-            <a:pPr algn="ctr">
-              <a:defRPr sz="1400" b="0">
-                <a:solidFill>
-                  <a:srgbClr val="FFFFFF"/>
-                </a:solidFill>
-              </a:defRPr>
-            </a:pPr>
-            <a:r>
-              <a:t>提示：studentka = 女大学生，universitet = 大学</a:t>
-            </a:r>
-          </a:p>
-        </p:txBody>
-      </p:sp>
-      <p:sp>
-        <p:nvSpPr>
-          <p:cNvPr id="12" name="TextBox 11"/>
+              <a:t>3. У неё нет времени.</a:t>
+            </a:r>
+          </a:p>
+        </p:txBody>
+      </p:sp>
+      <p:sp>
+        <p:nvSpPr>
+          <p:cNvPr id="14" name="TextBox 13"/>
           <p:cNvSpPr txBox="1"/>
           <p:nvPr/>
         </p:nvSpPr>
@@ -8251,7 +7329,7 @@
               </a:defRPr>
             </a:pPr>
             <a:r>
-              <a:t>Day1-L1/12</a:t>
+              <a:t>День 1/84</a:t>
             </a:r>
           </a:p>
         </p:txBody>
